--- a/instructor/slides/pptx/labs/15-flatten-one-level-of-nested-arrays.pptx
+++ b/instructor/slides/pptx/labs/15-flatten-one-level-of-nested-arrays.pptx
@@ -3950,8 +3950,8 @@
         </p:nvSpPr>
         <p:spPr>
           <a:xfrm>
-            <a:off x="640080" y="1920240"/>
-            <a:ext cx="10972800" cy="1463040"/>
+            <a:off x="640080" y="1828800"/>
+            <a:ext cx="6675120" cy="1645920"/>
           </a:xfrm>
           <a:prstGeom prst="rect">
             <a:avLst/>
@@ -3965,7 +3965,7 @@
           <a:lstStyle/>
           <a:p>
             <a:r>
-              <a:rPr sz="4400" b="1">
+              <a:rPr sz="4000" b="1">
                 <a:solidFill>
                   <a:srgbClr val="FFFFFF"/>
                 </a:solidFill>
@@ -3984,8 +3984,8 @@
         </p:nvSpPr>
         <p:spPr>
           <a:xfrm>
-            <a:off x="640080" y="3657600"/>
-            <a:ext cx="10789920" cy="1097280"/>
+            <a:off x="640080" y="3794760"/>
+            <a:ext cx="6675120" cy="1097280"/>
           </a:xfrm>
           <a:prstGeom prst="rect">
             <a:avLst/>
@@ -3999,7 +3999,7 @@
           <a:lstStyle/>
           <a:p>
             <a:r>
-              <a:rPr sz="2000" b="0">
+              <a:rPr sz="1800" b="0">
                 <a:solidFill>
                   <a:srgbClr val="B7CBDE"/>
                 </a:solidFill>
@@ -4018,8 +4018,8 @@
         </p:nvSpPr>
         <p:spPr>
           <a:xfrm>
-            <a:off x="640080" y="5029200"/>
-            <a:ext cx="10972800" cy="457200"/>
+            <a:off x="640080" y="5120640"/>
+            <a:ext cx="6766560" cy="457200"/>
           </a:xfrm>
           <a:prstGeom prst="rect">
             <a:avLst/>
@@ -4033,7 +4033,7 @@
           <a:lstStyle/>
           <a:p>
             <a:r>
-              <a:rPr sz="1600" b="0">
+              <a:rPr sz="1500" b="0">
                 <a:solidFill>
                   <a:srgbClr val="3EC6FF"/>
                 </a:solidFill>
@@ -4044,6 +4044,30 @@
           </a:p>
         </p:txBody>
       </p:sp>
+      <p:pic>
+        <p:nvPicPr>
+          <p:cNvPr id="7" name="Picture 6" descr="dw-map-filter.jpg"/>
+          <p:cNvPicPr>
+            <a:picLocks noChangeAspect="1"/>
+          </p:cNvPicPr>
+          <p:nvPr/>
+        </p:nvPicPr>
+        <p:blipFill>
+          <a:blip r:embed="rId2"/>
+          <a:stretch>
+            <a:fillRect/>
+          </a:stretch>
+        </p:blipFill>
+        <p:spPr>
+          <a:xfrm>
+            <a:off x="7452360" y="1325880"/>
+            <a:ext cx="4160520" cy="4160520"/>
+          </a:xfrm>
+          <a:prstGeom prst="rect">
+            <a:avLst/>
+          </a:prstGeom>
+        </p:spPr>
+      </p:pic>
     </p:spTree>
   </p:cSld>
   <p:clrMapOvr>
@@ -4147,8 +4171,8 @@
         </p:nvSpPr>
         <p:spPr>
           <a:xfrm>
-            <a:off x="640080" y="685800"/>
-            <a:ext cx="10972800" cy="1463040"/>
+            <a:off x="640080" y="658368"/>
+            <a:ext cx="7863840" cy="1645920"/>
           </a:xfrm>
           <a:prstGeom prst="rect">
             <a:avLst/>
@@ -4162,7 +4186,7 @@
           <a:lstStyle/>
           <a:p>
             <a:r>
-              <a:rPr sz="3200" b="1">
+              <a:rPr sz="3000" b="1">
                 <a:solidFill>
                   <a:srgbClr val="FFFFFF"/>
                 </a:solidFill>
@@ -4181,8 +4205,8 @@
         </p:nvSpPr>
         <p:spPr>
           <a:xfrm>
-            <a:off x="777240" y="2286000"/>
-            <a:ext cx="10607040" cy="4754880"/>
+            <a:off x="777240" y="2331720"/>
+            <a:ext cx="7498079" cy="4754880"/>
           </a:xfrm>
           <a:prstGeom prst="rect">
             <a:avLst/>
@@ -4201,7 +4225,7 @@
               </a:spcAft>
             </a:pPr>
             <a:r>
-              <a:rPr sz="2400" b="0">
+              <a:rPr sz="2200" b="0">
                 <a:solidFill>
                   <a:srgbClr val="FFFFFF"/>
                 </a:solidFill>
@@ -4217,7 +4241,7 @@
               </a:spcAft>
             </a:pPr>
             <a:r>
-              <a:rPr sz="2400" b="0">
+              <a:rPr sz="2200" b="0">
                 <a:solidFill>
                   <a:srgbClr val="FFFFFF"/>
                 </a:solidFill>
@@ -4228,6 +4252,30 @@
           </a:p>
         </p:txBody>
       </p:sp>
+      <p:pic>
+        <p:nvPicPr>
+          <p:cNvPr id="6" name="Picture 5" descr="dw-map-filter.jpg"/>
+          <p:cNvPicPr>
+            <a:picLocks noChangeAspect="1"/>
+          </p:cNvPicPr>
+          <p:nvPr/>
+        </p:nvPicPr>
+        <p:blipFill>
+          <a:blip r:embed="rId2"/>
+          <a:stretch>
+            <a:fillRect/>
+          </a:stretch>
+        </p:blipFill>
+        <p:spPr>
+          <a:xfrm>
+            <a:off x="8732520" y="2057400"/>
+            <a:ext cx="2880360" cy="2880360"/>
+          </a:xfrm>
+          <a:prstGeom prst="rect">
+            <a:avLst/>
+          </a:prstGeom>
+        </p:spPr>
+      </p:pic>
     </p:spTree>
   </p:cSld>
   <p:clrMapOvr>
@@ -4331,8 +4379,8 @@
         </p:nvSpPr>
         <p:spPr>
           <a:xfrm>
-            <a:off x="640080" y="685800"/>
-            <a:ext cx="10972800" cy="1463040"/>
+            <a:off x="640080" y="658368"/>
+            <a:ext cx="7863840" cy="1645920"/>
           </a:xfrm>
           <a:prstGeom prst="rect">
             <a:avLst/>
@@ -4346,7 +4394,7 @@
           <a:lstStyle/>
           <a:p>
             <a:r>
-              <a:rPr sz="3200" b="1">
+              <a:rPr sz="3000" b="1">
                 <a:solidFill>
                   <a:srgbClr val="FFFFFF"/>
                 </a:solidFill>
@@ -4365,8 +4413,8 @@
         </p:nvSpPr>
         <p:spPr>
           <a:xfrm>
-            <a:off x="777240" y="2286000"/>
-            <a:ext cx="10607040" cy="4754880"/>
+            <a:off x="777240" y="2331720"/>
+            <a:ext cx="7498079" cy="4754880"/>
           </a:xfrm>
           <a:prstGeom prst="rect">
             <a:avLst/>
@@ -4385,7 +4433,7 @@
               </a:spcAft>
             </a:pPr>
             <a:r>
-              <a:rPr sz="2400" b="0">
+              <a:rPr sz="2200" b="0">
                 <a:solidFill>
                   <a:srgbClr val="FFFFFF"/>
                 </a:solidFill>
@@ -4396,6 +4444,30 @@
           </a:p>
         </p:txBody>
       </p:sp>
+      <p:pic>
+        <p:nvPicPr>
+          <p:cNvPr id="6" name="Picture 5" descr="dw-map-filter.jpg"/>
+          <p:cNvPicPr>
+            <a:picLocks noChangeAspect="1"/>
+          </p:cNvPicPr>
+          <p:nvPr/>
+        </p:nvPicPr>
+        <p:blipFill>
+          <a:blip r:embed="rId2"/>
+          <a:stretch>
+            <a:fillRect/>
+          </a:stretch>
+        </p:blipFill>
+        <p:spPr>
+          <a:xfrm>
+            <a:off x="8732520" y="2057400"/>
+            <a:ext cx="2880360" cy="2880360"/>
+          </a:xfrm>
+          <a:prstGeom prst="rect">
+            <a:avLst/>
+          </a:prstGeom>
+        </p:spPr>
+      </p:pic>
     </p:spTree>
   </p:cSld>
   <p:clrMapOvr>
@@ -4499,8 +4571,8 @@
         </p:nvSpPr>
         <p:spPr>
           <a:xfrm>
-            <a:off x="640080" y="685800"/>
-            <a:ext cx="10972800" cy="1463040"/>
+            <a:off x="640080" y="658368"/>
+            <a:ext cx="10972800" cy="1645920"/>
           </a:xfrm>
           <a:prstGeom prst="rect">
             <a:avLst/>
@@ -4514,7 +4586,7 @@
           <a:lstStyle/>
           <a:p>
             <a:r>
-              <a:rPr sz="3200" b="1">
+              <a:rPr sz="3000" b="1">
                 <a:solidFill>
                   <a:srgbClr val="FFFFFF"/>
                 </a:solidFill>
@@ -4684,8 +4756,8 @@
         </p:nvSpPr>
         <p:spPr>
           <a:xfrm>
-            <a:off x="640080" y="685800"/>
-            <a:ext cx="10972800" cy="1463040"/>
+            <a:off x="640080" y="658368"/>
+            <a:ext cx="7863840" cy="1645920"/>
           </a:xfrm>
           <a:prstGeom prst="rect">
             <a:avLst/>
@@ -4699,7 +4771,7 @@
           <a:lstStyle/>
           <a:p>
             <a:r>
-              <a:rPr sz="3200" b="1">
+              <a:rPr sz="3000" b="1">
                 <a:solidFill>
                   <a:srgbClr val="FFFFFF"/>
                 </a:solidFill>
@@ -4718,8 +4790,8 @@
         </p:nvSpPr>
         <p:spPr>
           <a:xfrm>
-            <a:off x="777240" y="2286000"/>
-            <a:ext cx="10607040" cy="4754880"/>
+            <a:off x="777240" y="2331720"/>
+            <a:ext cx="7498079" cy="4754880"/>
           </a:xfrm>
           <a:prstGeom prst="rect">
             <a:avLst/>
@@ -4738,7 +4810,7 @@
               </a:spcAft>
             </a:pPr>
             <a:r>
-              <a:rPr sz="2400" b="0">
+              <a:rPr sz="2200" b="0">
                 <a:solidFill>
                   <a:srgbClr val="FFB020"/>
                 </a:solidFill>
@@ -4754,7 +4826,7 @@
               </a:spcAft>
             </a:pPr>
             <a:r>
-              <a:rPr sz="2400" b="0">
+              <a:rPr sz="2200" b="0">
                 <a:solidFill>
                   <a:srgbClr val="FFB020"/>
                 </a:solidFill>
@@ -4770,7 +4842,7 @@
               </a:spcAft>
             </a:pPr>
             <a:r>
-              <a:rPr sz="2400" b="0">
+              <a:rPr sz="2200" b="0">
                 <a:solidFill>
                   <a:srgbClr val="FFB020"/>
                 </a:solidFill>
@@ -4786,7 +4858,7 @@
               </a:spcAft>
             </a:pPr>
             <a:r>
-              <a:rPr sz="2400" b="0">
+              <a:rPr sz="2200" b="0">
                 <a:solidFill>
                   <a:srgbClr val="FFB020"/>
                 </a:solidFill>
@@ -4797,6 +4869,30 @@
           </a:p>
         </p:txBody>
       </p:sp>
+      <p:pic>
+        <p:nvPicPr>
+          <p:cNvPr id="6" name="Picture 5" descr="dw-pause.jpg"/>
+          <p:cNvPicPr>
+            <a:picLocks noChangeAspect="1"/>
+          </p:cNvPicPr>
+          <p:nvPr/>
+        </p:nvPicPr>
+        <p:blipFill>
+          <a:blip r:embed="rId2"/>
+          <a:stretch>
+            <a:fillRect/>
+          </a:stretch>
+        </p:blipFill>
+        <p:spPr>
+          <a:xfrm>
+            <a:off x="8366760" y="1874519"/>
+            <a:ext cx="3246120" cy="3246120"/>
+          </a:xfrm>
+          <a:prstGeom prst="rect">
+            <a:avLst/>
+          </a:prstGeom>
+        </p:spPr>
+      </p:pic>
     </p:spTree>
   </p:cSld>
   <p:clrMapOvr>
@@ -4900,8 +4996,8 @@
         </p:nvSpPr>
         <p:spPr>
           <a:xfrm>
-            <a:off x="640080" y="685800"/>
-            <a:ext cx="10972800" cy="1463040"/>
+            <a:off x="640080" y="658368"/>
+            <a:ext cx="7863840" cy="1645920"/>
           </a:xfrm>
           <a:prstGeom prst="rect">
             <a:avLst/>
@@ -4915,7 +5011,7 @@
           <a:lstStyle/>
           <a:p>
             <a:r>
-              <a:rPr sz="3200" b="1">
+              <a:rPr sz="3000" b="1">
                 <a:solidFill>
                   <a:srgbClr val="FFFFFF"/>
                 </a:solidFill>
@@ -4934,8 +5030,8 @@
         </p:nvSpPr>
         <p:spPr>
           <a:xfrm>
-            <a:off x="777240" y="2286000"/>
-            <a:ext cx="10607040" cy="4754880"/>
+            <a:off x="777240" y="2331720"/>
+            <a:ext cx="7498079" cy="4754880"/>
           </a:xfrm>
           <a:prstGeom prst="rect">
             <a:avLst/>
@@ -4954,7 +5050,7 @@
               </a:spcAft>
             </a:pPr>
             <a:r>
-              <a:rPr sz="2400" b="0">
+              <a:rPr sz="2200" b="0">
                 <a:solidFill>
                   <a:srgbClr val="FFFFFF"/>
                 </a:solidFill>
@@ -4970,7 +5066,7 @@
               </a:spcAft>
             </a:pPr>
             <a:r>
-              <a:rPr sz="2400" b="0">
+              <a:rPr sz="2200" b="0">
                 <a:solidFill>
                   <a:srgbClr val="FFFFFF"/>
                 </a:solidFill>
@@ -4986,7 +5082,7 @@
               </a:spcAft>
             </a:pPr>
             <a:r>
-              <a:rPr sz="2400" b="0">
+              <a:rPr sz="2200" b="0">
                 <a:solidFill>
                   <a:srgbClr val="FFFFFF"/>
                 </a:solidFill>
@@ -4997,6 +5093,30 @@
           </a:p>
         </p:txBody>
       </p:sp>
+      <p:pic>
+        <p:nvPicPr>
+          <p:cNvPr id="6" name="Picture 5" descr="dw-map-filter.jpg"/>
+          <p:cNvPicPr>
+            <a:picLocks noChangeAspect="1"/>
+          </p:cNvPicPr>
+          <p:nvPr/>
+        </p:nvPicPr>
+        <p:blipFill>
+          <a:blip r:embed="rId2"/>
+          <a:stretch>
+            <a:fillRect/>
+          </a:stretch>
+        </p:blipFill>
+        <p:spPr>
+          <a:xfrm>
+            <a:off x="8732520" y="2057400"/>
+            <a:ext cx="2880360" cy="2880360"/>
+          </a:xfrm>
+          <a:prstGeom prst="rect">
+            <a:avLst/>
+          </a:prstGeom>
+        </p:spPr>
+      </p:pic>
     </p:spTree>
   </p:cSld>
   <p:clrMapOvr>
@@ -5100,8 +5220,8 @@
         </p:nvSpPr>
         <p:spPr>
           <a:xfrm>
-            <a:off x="640080" y="685800"/>
-            <a:ext cx="10972800" cy="1463040"/>
+            <a:off x="640080" y="658368"/>
+            <a:ext cx="10972800" cy="1645920"/>
           </a:xfrm>
           <a:prstGeom prst="rect">
             <a:avLst/>
@@ -5115,7 +5235,7 @@
           <a:lstStyle/>
           <a:p>
             <a:r>
-              <a:rPr sz="3200" b="1">
+              <a:rPr sz="3000" b="1">
                 <a:solidFill>
                   <a:srgbClr val="FFFFFF"/>
                 </a:solidFill>
@@ -5333,8 +5453,8 @@
         </p:nvSpPr>
         <p:spPr>
           <a:xfrm>
-            <a:off x="640080" y="685800"/>
-            <a:ext cx="10972800" cy="1463040"/>
+            <a:off x="640080" y="658368"/>
+            <a:ext cx="7863840" cy="1645920"/>
           </a:xfrm>
           <a:prstGeom prst="rect">
             <a:avLst/>
@@ -5348,7 +5468,7 @@
           <a:lstStyle/>
           <a:p>
             <a:r>
-              <a:rPr sz="3200" b="1">
+              <a:rPr sz="3000" b="1">
                 <a:solidFill>
                   <a:srgbClr val="FFFFFF"/>
                 </a:solidFill>
@@ -5367,8 +5487,8 @@
         </p:nvSpPr>
         <p:spPr>
           <a:xfrm>
-            <a:off x="777240" y="2286000"/>
-            <a:ext cx="10607040" cy="4754880"/>
+            <a:off x="777240" y="2331720"/>
+            <a:ext cx="7498079" cy="4754880"/>
           </a:xfrm>
           <a:prstGeom prst="rect">
             <a:avLst/>
@@ -5387,7 +5507,7 @@
               </a:spcAft>
             </a:pPr>
             <a:r>
-              <a:rPr sz="2400" b="0">
+              <a:rPr sz="2200" b="0">
                 <a:solidFill>
                   <a:srgbClr val="FFFFFF"/>
                 </a:solidFill>
@@ -5403,7 +5523,7 @@
               </a:spcAft>
             </a:pPr>
             <a:r>
-              <a:rPr sz="2400" b="0">
+              <a:rPr sz="2200" b="0">
                 <a:solidFill>
                   <a:srgbClr val="FFFFFF"/>
                 </a:solidFill>
@@ -5419,7 +5539,7 @@
               </a:spcAft>
             </a:pPr>
             <a:r>
-              <a:rPr sz="2400" b="0">
+              <a:rPr sz="2200" b="0">
                 <a:solidFill>
                   <a:srgbClr val="FFFFFF"/>
                 </a:solidFill>
@@ -5430,6 +5550,30 @@
           </a:p>
         </p:txBody>
       </p:sp>
+      <p:pic>
+        <p:nvPicPr>
+          <p:cNvPr id="6" name="Picture 5" descr="dw-interview.jpg"/>
+          <p:cNvPicPr>
+            <a:picLocks noChangeAspect="1"/>
+          </p:cNvPicPr>
+          <p:nvPr/>
+        </p:nvPicPr>
+        <p:blipFill>
+          <a:blip r:embed="rId2"/>
+          <a:stretch>
+            <a:fillRect/>
+          </a:stretch>
+        </p:blipFill>
+        <p:spPr>
+          <a:xfrm>
+            <a:off x="8732520" y="2057400"/>
+            <a:ext cx="2880360" cy="2880360"/>
+          </a:xfrm>
+          <a:prstGeom prst="rect">
+            <a:avLst/>
+          </a:prstGeom>
+        </p:spPr>
+      </p:pic>
     </p:spTree>
   </p:cSld>
   <p:clrMapOvr>
